--- a/TestImage.pptx
+++ b/TestImage.pptx
@@ -262,7 +262,7 @@
           <a:p>
             <a:fld id="{2F6B625A-32EE-2248-9423-7363B0CCF293}" type="datetimeFigureOut">
               <a:rPr lang="fr-FR" smtClean="0"/>
-              <a:t>10/08/2025</a:t>
+              <a:t>21/10/2025</a:t>
             </a:fld>
             <a:endParaRPr lang="fr-FR" dirty="0"/>
           </a:p>
@@ -460,7 +460,7 @@
           <a:p>
             <a:fld id="{2F6B625A-32EE-2248-9423-7363B0CCF293}" type="datetimeFigureOut">
               <a:rPr lang="fr-FR" smtClean="0"/>
-              <a:t>10/08/2025</a:t>
+              <a:t>21/10/2025</a:t>
             </a:fld>
             <a:endParaRPr lang="fr-FR" dirty="0"/>
           </a:p>
@@ -668,7 +668,7 @@
           <a:p>
             <a:fld id="{2F6B625A-32EE-2248-9423-7363B0CCF293}" type="datetimeFigureOut">
               <a:rPr lang="fr-FR" smtClean="0"/>
-              <a:t>10/08/2025</a:t>
+              <a:t>21/10/2025</a:t>
             </a:fld>
             <a:endParaRPr lang="fr-FR" dirty="0"/>
           </a:p>
@@ -866,7 +866,7 @@
           <a:p>
             <a:fld id="{2F6B625A-32EE-2248-9423-7363B0CCF293}" type="datetimeFigureOut">
               <a:rPr lang="fr-FR" smtClean="0"/>
-              <a:t>10/08/2025</a:t>
+              <a:t>21/10/2025</a:t>
             </a:fld>
             <a:endParaRPr lang="fr-FR" dirty="0"/>
           </a:p>
@@ -1141,7 +1141,7 @@
           <a:p>
             <a:fld id="{2F6B625A-32EE-2248-9423-7363B0CCF293}" type="datetimeFigureOut">
               <a:rPr lang="fr-FR" smtClean="0"/>
-              <a:t>10/08/2025</a:t>
+              <a:t>21/10/2025</a:t>
             </a:fld>
             <a:endParaRPr lang="fr-FR" dirty="0"/>
           </a:p>
@@ -1406,7 +1406,7 @@
           <a:p>
             <a:fld id="{2F6B625A-32EE-2248-9423-7363B0CCF293}" type="datetimeFigureOut">
               <a:rPr lang="fr-FR" smtClean="0"/>
-              <a:t>10/08/2025</a:t>
+              <a:t>21/10/2025</a:t>
             </a:fld>
             <a:endParaRPr lang="fr-FR" dirty="0"/>
           </a:p>
@@ -1818,7 +1818,7 @@
           <a:p>
             <a:fld id="{2F6B625A-32EE-2248-9423-7363B0CCF293}" type="datetimeFigureOut">
               <a:rPr lang="fr-FR" smtClean="0"/>
-              <a:t>10/08/2025</a:t>
+              <a:t>21/10/2025</a:t>
             </a:fld>
             <a:endParaRPr lang="fr-FR" dirty="0"/>
           </a:p>
@@ -1959,7 +1959,7 @@
           <a:p>
             <a:fld id="{2F6B625A-32EE-2248-9423-7363B0CCF293}" type="datetimeFigureOut">
               <a:rPr lang="fr-FR" smtClean="0"/>
-              <a:t>10/08/2025</a:t>
+              <a:t>21/10/2025</a:t>
             </a:fld>
             <a:endParaRPr lang="fr-FR" dirty="0"/>
           </a:p>
@@ -2072,7 +2072,7 @@
           <a:p>
             <a:fld id="{2F6B625A-32EE-2248-9423-7363B0CCF293}" type="datetimeFigureOut">
               <a:rPr lang="fr-FR" smtClean="0"/>
-              <a:t>10/08/2025</a:t>
+              <a:t>21/10/2025</a:t>
             </a:fld>
             <a:endParaRPr lang="fr-FR" dirty="0"/>
           </a:p>
@@ -2383,7 +2383,7 @@
           <a:p>
             <a:fld id="{2F6B625A-32EE-2248-9423-7363B0CCF293}" type="datetimeFigureOut">
               <a:rPr lang="fr-FR" smtClean="0"/>
-              <a:t>10/08/2025</a:t>
+              <a:t>21/10/2025</a:t>
             </a:fld>
             <a:endParaRPr lang="fr-FR" dirty="0"/>
           </a:p>
@@ -2671,7 +2671,7 @@
           <a:p>
             <a:fld id="{2F6B625A-32EE-2248-9423-7363B0CCF293}" type="datetimeFigureOut">
               <a:rPr lang="fr-FR" smtClean="0"/>
-              <a:t>10/08/2025</a:t>
+              <a:t>21/10/2025</a:t>
             </a:fld>
             <a:endParaRPr lang="fr-FR" dirty="0"/>
           </a:p>
@@ -2912,7 +2912,7 @@
           <a:p>
             <a:fld id="{2F6B625A-32EE-2248-9423-7363B0CCF293}" type="datetimeFigureOut">
               <a:rPr lang="fr-FR" smtClean="0"/>
-              <a:t>10/08/2025</a:t>
+              <a:t>21/10/2025</a:t>
             </a:fld>
             <a:endParaRPr lang="fr-FR" dirty="0"/>
           </a:p>
@@ -8588,7 +8588,8 @@
             <a:solidFill>
               <a:srgbClr val="FF0000"/>
             </a:solidFill>
-            <a:tailEnd type="triangle"/>
+            <a:headEnd type="triangle" w="med" len="med"/>
+            <a:tailEnd type="triangle" w="med" len="med"/>
           </a:ln>
         </p:spPr>
         <p:style>
@@ -10116,7 +10117,7 @@
           </a:prstGeom>
           <a:ln>
             <a:solidFill>
-              <a:schemeClr val="tx1"/>
+              <a:srgbClr val="FFC000"/>
             </a:solidFill>
           </a:ln>
         </p:spPr>
@@ -10157,7 +10158,7 @@
           </a:prstGeom>
           <a:ln>
             <a:solidFill>
-              <a:schemeClr val="tx1"/>
+              <a:srgbClr val="FFC000"/>
             </a:solidFill>
           </a:ln>
         </p:spPr>
@@ -10192,7 +10193,7 @@
         </p:nvCxnSpPr>
         <p:spPr>
           <a:xfrm>
-            <a:off x="3018399" y="4579026"/>
+            <a:off x="3024829" y="4579026"/>
             <a:ext cx="467305" cy="11761"/>
           </a:xfrm>
           <a:prstGeom prst="straightConnector1">
@@ -10494,7 +10495,7 @@
           </a:prstGeom>
           <a:ln>
             <a:solidFill>
-              <a:schemeClr val="tx1"/>
+              <a:srgbClr val="FFC000"/>
             </a:solidFill>
           </a:ln>
         </p:spPr>
@@ -10535,7 +10536,7 @@
           </a:prstGeom>
           <a:ln>
             <a:solidFill>
-              <a:schemeClr val="tx1"/>
+              <a:srgbClr val="FFC000"/>
             </a:solidFill>
           </a:ln>
         </p:spPr>
@@ -10570,7 +10571,7 @@
         </p:nvCxnSpPr>
         <p:spPr>
           <a:xfrm>
-            <a:off x="5167685" y="4565112"/>
+            <a:off x="5166014" y="4565112"/>
             <a:ext cx="467305" cy="11761"/>
           </a:xfrm>
           <a:prstGeom prst="straightConnector1">
@@ -10698,7 +10699,7 @@
         </p:nvCxnSpPr>
         <p:spPr>
           <a:xfrm flipV="1">
-            <a:off x="5937223" y="4389521"/>
+            <a:off x="6403563" y="4675871"/>
             <a:ext cx="0" cy="351182"/>
           </a:xfrm>
           <a:prstGeom prst="straightConnector1">
@@ -10823,7 +10824,7 @@
         </p:nvCxnSpPr>
         <p:spPr>
           <a:xfrm rot="10800000" flipV="1">
-            <a:off x="6060178" y="4389521"/>
+            <a:off x="6547236" y="4705908"/>
             <a:ext cx="0" cy="351182"/>
           </a:xfrm>
           <a:prstGeom prst="straightConnector1">
@@ -10870,7 +10871,7 @@
           </a:prstGeom>
           <a:ln>
             <a:solidFill>
-              <a:schemeClr val="tx1"/>
+              <a:srgbClr val="FFC000"/>
             </a:solidFill>
           </a:ln>
         </p:spPr>
@@ -10911,7 +10912,7 @@
           </a:prstGeom>
           <a:ln>
             <a:solidFill>
-              <a:schemeClr val="tx1"/>
+              <a:srgbClr val="FFC000"/>
             </a:solidFill>
           </a:ln>
         </p:spPr>
@@ -10946,7 +10947,7 @@
         </p:nvCxnSpPr>
         <p:spPr>
           <a:xfrm>
-            <a:off x="1567203" y="5744389"/>
+            <a:off x="1597066" y="5744389"/>
             <a:ext cx="467305" cy="11761"/>
           </a:xfrm>
           <a:prstGeom prst="straightConnector1">
@@ -11033,7 +11034,7 @@
         </p:nvCxnSpPr>
         <p:spPr>
           <a:xfrm rot="10800000" flipV="1">
-            <a:off x="2939481" y="5905826"/>
+            <a:off x="3286723" y="5570160"/>
             <a:ext cx="0" cy="351182"/>
           </a:xfrm>
           <a:prstGeom prst="straightConnector1">
@@ -11074,7 +11075,7 @@
         </p:nvCxnSpPr>
         <p:spPr>
           <a:xfrm flipV="1">
-            <a:off x="2395879" y="5571855"/>
+            <a:off x="2812568" y="5884373"/>
             <a:ext cx="0" cy="351182"/>
           </a:xfrm>
           <a:prstGeom prst="straightConnector1">
@@ -11248,7 +11249,7 @@
           </a:prstGeom>
           <a:ln>
             <a:solidFill>
-              <a:schemeClr val="tx1"/>
+              <a:srgbClr val="FFC000"/>
             </a:solidFill>
           </a:ln>
         </p:spPr>
@@ -11289,7 +11290,7 @@
           </a:prstGeom>
           <a:ln>
             <a:solidFill>
-              <a:schemeClr val="tx1"/>
+              <a:srgbClr val="FFC000"/>
             </a:solidFill>
           </a:ln>
         </p:spPr>
@@ -11324,7 +11325,7 @@
         </p:nvCxnSpPr>
         <p:spPr>
           <a:xfrm>
-            <a:off x="3874266" y="5750269"/>
+            <a:off x="3879720" y="5750269"/>
             <a:ext cx="467305" cy="11761"/>
           </a:xfrm>
           <a:prstGeom prst="straightConnector1">
@@ -11573,7 +11574,7 @@
         </p:nvCxnSpPr>
         <p:spPr>
           <a:xfrm rot="10800000" flipV="1">
-            <a:off x="4778521" y="5617491"/>
+            <a:off x="4778521" y="5582766"/>
             <a:ext cx="0" cy="351182"/>
           </a:xfrm>
           <a:prstGeom prst="straightConnector1">
@@ -11622,7 +11623,7 @@
           </a:prstGeom>
           <a:ln>
             <a:solidFill>
-              <a:schemeClr val="tx1"/>
+              <a:srgbClr val="FFC000"/>
             </a:solidFill>
           </a:ln>
         </p:spPr>
@@ -11663,7 +11664,7 @@
           </a:prstGeom>
           <a:ln>
             <a:solidFill>
-              <a:schemeClr val="tx1"/>
+              <a:srgbClr val="FFC000"/>
             </a:solidFill>
           </a:ln>
         </p:spPr>
@@ -11682,6 +11683,400 @@
           </a:fontRef>
         </p:style>
       </p:cxnSp>
+      <p:sp>
+        <p:nvSpPr>
+          <p:cNvPr id="2" name="ZoneTexte 1">
+            <a:extLst>
+              <a:ext uri="{FF2B5EF4-FFF2-40B4-BE49-F238E27FC236}">
+                <a16:creationId xmlns:a16="http://schemas.microsoft.com/office/drawing/2014/main" id="{3EF8FF77-3981-1C40-BCEC-D75AFD02210C}"/>
+              </a:ext>
+            </a:extLst>
+          </p:cNvPr>
+          <p:cNvSpPr txBox="1"/>
+          <p:nvPr/>
+        </p:nvSpPr>
+        <p:spPr>
+          <a:xfrm>
+            <a:off x="2883827" y="4146524"/>
+            <a:ext cx="749308" cy="369332"/>
+          </a:xfrm>
+          <a:prstGeom prst="rect">
+            <a:avLst/>
+          </a:prstGeom>
+          <a:noFill/>
+        </p:spPr>
+        <p:txBody>
+          <a:bodyPr wrap="none" rtlCol="0">
+            <a:spAutoFit/>
+          </a:bodyPr>
+          <a:lstStyle/>
+          <a:p>
+            <a:r>
+              <a:rPr lang="fr-FR" dirty="0"/>
+              <a:t>LMCT</a:t>
+            </a:r>
+          </a:p>
+        </p:txBody>
+      </p:sp>
+      <p:sp>
+        <p:nvSpPr>
+          <p:cNvPr id="3" name="ZoneTexte 2">
+            <a:extLst>
+              <a:ext uri="{FF2B5EF4-FFF2-40B4-BE49-F238E27FC236}">
+                <a16:creationId xmlns:a16="http://schemas.microsoft.com/office/drawing/2014/main" id="{CE673F9D-42A5-D71F-BE84-ACF92DE6372F}"/>
+              </a:ext>
+            </a:extLst>
+          </p:cNvPr>
+          <p:cNvSpPr txBox="1"/>
+          <p:nvPr/>
+        </p:nvSpPr>
+        <p:spPr>
+          <a:xfrm>
+            <a:off x="5025012" y="4146524"/>
+            <a:ext cx="743024" cy="369332"/>
+          </a:xfrm>
+          <a:prstGeom prst="rect">
+            <a:avLst/>
+          </a:prstGeom>
+          <a:noFill/>
+        </p:spPr>
+        <p:txBody>
+          <a:bodyPr wrap="none" rtlCol="0">
+            <a:spAutoFit/>
+          </a:bodyPr>
+          <a:lstStyle/>
+          <a:p>
+            <a:r>
+              <a:rPr lang="fr-FR" dirty="0"/>
+              <a:t>MLCT</a:t>
+            </a:r>
+          </a:p>
+        </p:txBody>
+      </p:sp>
+      <p:sp>
+        <p:nvSpPr>
+          <p:cNvPr id="8" name="ZoneTexte 7">
+            <a:extLst>
+              <a:ext uri="{FF2B5EF4-FFF2-40B4-BE49-F238E27FC236}">
+                <a16:creationId xmlns:a16="http://schemas.microsoft.com/office/drawing/2014/main" id="{F809E063-BB5B-F858-85E2-113F06BE8E7D}"/>
+              </a:ext>
+            </a:extLst>
+          </p:cNvPr>
+          <p:cNvSpPr txBox="1"/>
+          <p:nvPr/>
+        </p:nvSpPr>
+        <p:spPr>
+          <a:xfrm>
+            <a:off x="1459206" y="5303449"/>
+            <a:ext cx="749308" cy="369332"/>
+          </a:xfrm>
+          <a:prstGeom prst="rect">
+            <a:avLst/>
+          </a:prstGeom>
+          <a:noFill/>
+        </p:spPr>
+        <p:txBody>
+          <a:bodyPr wrap="none" rtlCol="0">
+            <a:spAutoFit/>
+          </a:bodyPr>
+          <a:lstStyle/>
+          <a:p>
+            <a:r>
+              <a:rPr lang="fr-FR" dirty="0"/>
+              <a:t>LMCT</a:t>
+            </a:r>
+          </a:p>
+        </p:txBody>
+      </p:sp>
+      <p:sp>
+        <p:nvSpPr>
+          <p:cNvPr id="14" name="ZoneTexte 13">
+            <a:extLst>
+              <a:ext uri="{FF2B5EF4-FFF2-40B4-BE49-F238E27FC236}">
+                <a16:creationId xmlns:a16="http://schemas.microsoft.com/office/drawing/2014/main" id="{B0B32F6C-B18D-BBD5-BF51-DD36ECD63543}"/>
+              </a:ext>
+            </a:extLst>
+          </p:cNvPr>
+          <p:cNvSpPr txBox="1"/>
+          <p:nvPr/>
+        </p:nvSpPr>
+        <p:spPr>
+          <a:xfrm>
+            <a:off x="3741860" y="5303449"/>
+            <a:ext cx="743024" cy="369332"/>
+          </a:xfrm>
+          <a:prstGeom prst="rect">
+            <a:avLst/>
+          </a:prstGeom>
+          <a:noFill/>
+        </p:spPr>
+        <p:txBody>
+          <a:bodyPr wrap="none" rtlCol="0">
+            <a:spAutoFit/>
+          </a:bodyPr>
+          <a:lstStyle/>
+          <a:p>
+            <a:r>
+              <a:rPr lang="fr-FR" dirty="0"/>
+              <a:t>MLCT</a:t>
+            </a:r>
+          </a:p>
+        </p:txBody>
+      </p:sp>
+      <p:sp>
+        <p:nvSpPr>
+          <p:cNvPr id="24" name="ZoneTexte 23">
+            <a:extLst>
+              <a:ext uri="{FF2B5EF4-FFF2-40B4-BE49-F238E27FC236}">
+                <a16:creationId xmlns:a16="http://schemas.microsoft.com/office/drawing/2014/main" id="{016116F3-5C67-0746-F1AC-2703A7EF000E}"/>
+              </a:ext>
+            </a:extLst>
+          </p:cNvPr>
+          <p:cNvSpPr txBox="1"/>
+          <p:nvPr/>
+        </p:nvSpPr>
+        <p:spPr>
+          <a:xfrm>
+            <a:off x="156758" y="1379799"/>
+            <a:ext cx="386644" cy="369332"/>
+          </a:xfrm>
+          <a:prstGeom prst="rect">
+            <a:avLst/>
+          </a:prstGeom>
+          <a:noFill/>
+        </p:spPr>
+        <p:txBody>
+          <a:bodyPr wrap="none" rtlCol="0">
+            <a:spAutoFit/>
+          </a:bodyPr>
+          <a:lstStyle/>
+          <a:p>
+            <a:r>
+              <a:rPr lang="fr-FR" dirty="0"/>
+              <a:t>1-</a:t>
+            </a:r>
+          </a:p>
+        </p:txBody>
+      </p:sp>
+      <p:sp>
+        <p:nvSpPr>
+          <p:cNvPr id="43" name="ZoneTexte 42">
+            <a:extLst>
+              <a:ext uri="{FF2B5EF4-FFF2-40B4-BE49-F238E27FC236}">
+                <a16:creationId xmlns:a16="http://schemas.microsoft.com/office/drawing/2014/main" id="{1E4C96A3-15A8-1FA6-FF0B-6186D5ACC804}"/>
+              </a:ext>
+            </a:extLst>
+          </p:cNvPr>
+          <p:cNvSpPr txBox="1"/>
+          <p:nvPr/>
+        </p:nvSpPr>
+        <p:spPr>
+          <a:xfrm>
+            <a:off x="156758" y="2526149"/>
+            <a:ext cx="386644" cy="369332"/>
+          </a:xfrm>
+          <a:prstGeom prst="rect">
+            <a:avLst/>
+          </a:prstGeom>
+          <a:noFill/>
+        </p:spPr>
+        <p:txBody>
+          <a:bodyPr wrap="none" rtlCol="0">
+            <a:spAutoFit/>
+          </a:bodyPr>
+          <a:lstStyle/>
+          <a:p>
+            <a:r>
+              <a:rPr lang="fr-FR" dirty="0"/>
+              <a:t>2-</a:t>
+            </a:r>
+          </a:p>
+        </p:txBody>
+      </p:sp>
+      <p:sp>
+        <p:nvSpPr>
+          <p:cNvPr id="44" name="ZoneTexte 43">
+            <a:extLst>
+              <a:ext uri="{FF2B5EF4-FFF2-40B4-BE49-F238E27FC236}">
+                <a16:creationId xmlns:a16="http://schemas.microsoft.com/office/drawing/2014/main" id="{412F191A-CDF1-301F-72C1-4035504B7B49}"/>
+              </a:ext>
+            </a:extLst>
+          </p:cNvPr>
+          <p:cNvSpPr txBox="1"/>
+          <p:nvPr/>
+        </p:nvSpPr>
+        <p:spPr>
+          <a:xfrm>
+            <a:off x="156758" y="4753416"/>
+            <a:ext cx="386644" cy="369332"/>
+          </a:xfrm>
+          <a:prstGeom prst="rect">
+            <a:avLst/>
+          </a:prstGeom>
+          <a:noFill/>
+        </p:spPr>
+        <p:txBody>
+          <a:bodyPr wrap="none" rtlCol="0">
+            <a:spAutoFit/>
+          </a:bodyPr>
+          <a:lstStyle/>
+          <a:p>
+            <a:r>
+              <a:rPr lang="fr-FR" dirty="0"/>
+              <a:t>3-</a:t>
+            </a:r>
+          </a:p>
+        </p:txBody>
+      </p:sp>
+      <p:cxnSp>
+        <p:nvCxnSpPr>
+          <p:cNvPr id="46" name="Connecteur droit 45">
+            <a:extLst>
+              <a:ext uri="{FF2B5EF4-FFF2-40B4-BE49-F238E27FC236}">
+                <a16:creationId xmlns:a16="http://schemas.microsoft.com/office/drawing/2014/main" id="{708B6C48-ADD3-B5E1-E84A-1AEC0F10ADE1}"/>
+              </a:ext>
+            </a:extLst>
+          </p:cNvPr>
+          <p:cNvCxnSpPr>
+            <a:cxnSpLocks/>
+            <a:endCxn id="115" idx="1"/>
+          </p:cNvCxnSpPr>
+          <p:nvPr/>
+        </p:nvCxnSpPr>
+        <p:spPr>
+          <a:xfrm>
+            <a:off x="1388216" y="5149690"/>
+            <a:ext cx="5903835" cy="1044"/>
+          </a:xfrm>
+          <a:prstGeom prst="line">
+            <a:avLst/>
+          </a:prstGeom>
+          <a:ln>
+            <a:solidFill>
+              <a:srgbClr val="FF0000"/>
+            </a:solidFill>
+            <a:prstDash val="sysDot"/>
+          </a:ln>
+        </p:spPr>
+        <p:style>
+          <a:lnRef idx="2">
+            <a:schemeClr val="accent1"/>
+          </a:lnRef>
+          <a:fillRef idx="0">
+            <a:schemeClr val="accent1"/>
+          </a:fillRef>
+          <a:effectRef idx="1">
+            <a:schemeClr val="accent1"/>
+          </a:effectRef>
+          <a:fontRef idx="minor">
+            <a:schemeClr val="tx1"/>
+          </a:fontRef>
+        </p:style>
+      </p:cxnSp>
+      <p:sp>
+        <p:nvSpPr>
+          <p:cNvPr id="115" name="Parenthèse fermante 114">
+            <a:extLst>
+              <a:ext uri="{FF2B5EF4-FFF2-40B4-BE49-F238E27FC236}">
+                <a16:creationId xmlns:a16="http://schemas.microsoft.com/office/drawing/2014/main" id="{141C50E1-D754-ADC5-ACDF-7DCFE6CD9647}"/>
+              </a:ext>
+            </a:extLst>
+          </p:cNvPr>
+          <p:cNvSpPr/>
+          <p:nvPr/>
+        </p:nvSpPr>
+        <p:spPr>
+          <a:xfrm>
+            <a:off x="7292051" y="4565112"/>
+            <a:ext cx="254643" cy="585622"/>
+          </a:xfrm>
+          <a:prstGeom prst="rightBracket">
+            <a:avLst/>
+          </a:prstGeom>
+          <a:ln>
+            <a:solidFill>
+              <a:srgbClr val="FF0000"/>
+            </a:solidFill>
+            <a:prstDash val="sysDot"/>
+            <a:headEnd type="none" w="med" len="med"/>
+            <a:tailEnd type="none" w="med" len="med"/>
+          </a:ln>
+        </p:spPr>
+        <p:style>
+          <a:lnRef idx="2">
+            <a:schemeClr val="accent1"/>
+          </a:lnRef>
+          <a:fillRef idx="0">
+            <a:schemeClr val="accent1"/>
+          </a:fillRef>
+          <a:effectRef idx="1">
+            <a:schemeClr val="accent1"/>
+          </a:effectRef>
+          <a:fontRef idx="minor">
+            <a:schemeClr val="tx1"/>
+          </a:fontRef>
+        </p:style>
+        <p:txBody>
+          <a:bodyPr rtlCol="0" anchor="ctr"/>
+          <a:lstStyle/>
+          <a:p>
+            <a:pPr algn="ctr"/>
+            <a:endParaRPr lang="fr-FR"/>
+          </a:p>
+        </p:txBody>
+      </p:sp>
+      <p:sp>
+        <p:nvSpPr>
+          <p:cNvPr id="117" name="Parenthèse fermante 116">
+            <a:extLst>
+              <a:ext uri="{FF2B5EF4-FFF2-40B4-BE49-F238E27FC236}">
+                <a16:creationId xmlns:a16="http://schemas.microsoft.com/office/drawing/2014/main" id="{CFBC4254-4F2C-39FE-13A3-9F023814772E}"/>
+              </a:ext>
+            </a:extLst>
+          </p:cNvPr>
+          <p:cNvSpPr/>
+          <p:nvPr/>
+        </p:nvSpPr>
+        <p:spPr>
+          <a:xfrm rot="10800000">
+            <a:off x="1157904" y="5150899"/>
+            <a:ext cx="254643" cy="585622"/>
+          </a:xfrm>
+          <a:prstGeom prst="rightBracket">
+            <a:avLst/>
+          </a:prstGeom>
+          <a:ln>
+            <a:solidFill>
+              <a:srgbClr val="FF0000"/>
+            </a:solidFill>
+            <a:prstDash val="sysDot"/>
+            <a:headEnd type="triangle" w="med" len="med"/>
+            <a:tailEnd type="none" w="med" len="med"/>
+          </a:ln>
+        </p:spPr>
+        <p:style>
+          <a:lnRef idx="2">
+            <a:schemeClr val="accent1"/>
+          </a:lnRef>
+          <a:fillRef idx="0">
+            <a:schemeClr val="accent1"/>
+          </a:fillRef>
+          <a:effectRef idx="1">
+            <a:schemeClr val="accent1"/>
+          </a:effectRef>
+          <a:fontRef idx="minor">
+            <a:schemeClr val="tx1"/>
+          </a:fontRef>
+        </p:style>
+        <p:txBody>
+          <a:bodyPr rtlCol="0" anchor="ctr"/>
+          <a:lstStyle/>
+          <a:p>
+            <a:pPr algn="ctr"/>
+            <a:endParaRPr lang="fr-FR"/>
+          </a:p>
+        </p:txBody>
+      </p:sp>
     </p:spTree>
     <p:extLst>
       <p:ext uri="{BB962C8B-B14F-4D97-AF65-F5344CB8AC3E}">
